--- a/ゲーム科2年/01_後期/ゲームプログラミング応用Ⅰ/06_ノイズ.pptx
+++ b/ゲーム科2年/01_後期/ゲームプログラミング応用Ⅰ/06_ノイズ.pptx
@@ -22,9 +22,10 @@
     <p:sldId id="271" r:id="rId16"/>
     <p:sldId id="272" r:id="rId17"/>
     <p:sldId id="274" r:id="rId18"/>
-    <p:sldId id="273" r:id="rId19"/>
-    <p:sldId id="275" r:id="rId20"/>
-    <p:sldId id="276" r:id="rId21"/>
+    <p:sldId id="277" r:id="rId19"/>
+    <p:sldId id="273" r:id="rId20"/>
+    <p:sldId id="275" r:id="rId21"/>
+    <p:sldId id="276" r:id="rId22"/>
   </p:sldIdLst>
   <p:sldSz cx="12192000" cy="6858000"/>
   <p:notesSz cx="6858000" cy="9144000"/>
@@ -278,7 +279,7 @@
           <a:p>
             <a:fld id="{E9CC885B-4903-4D54-9A93-00025F12DED9}" type="datetimeFigureOut">
               <a:rPr kumimoji="1" lang="ja-JP" altLang="en-US" smtClean="0"/>
-              <a:t>2025/7/24</a:t>
+              <a:t>2025/7/25</a:t>
             </a:fld>
             <a:endParaRPr kumimoji="1" lang="ja-JP" altLang="en-US"/>
           </a:p>
@@ -508,7 +509,7 @@
           <a:p>
             <a:fld id="{E9CC885B-4903-4D54-9A93-00025F12DED9}" type="datetimeFigureOut">
               <a:rPr kumimoji="1" lang="ja-JP" altLang="en-US" smtClean="0"/>
-              <a:t>2025/7/24</a:t>
+              <a:t>2025/7/25</a:t>
             </a:fld>
             <a:endParaRPr kumimoji="1" lang="ja-JP" altLang="en-US"/>
           </a:p>
@@ -748,7 +749,7 @@
           <a:p>
             <a:fld id="{E9CC885B-4903-4D54-9A93-00025F12DED9}" type="datetimeFigureOut">
               <a:rPr kumimoji="1" lang="ja-JP" altLang="en-US" smtClean="0"/>
-              <a:t>2025/7/24</a:t>
+              <a:t>2025/7/25</a:t>
             </a:fld>
             <a:endParaRPr kumimoji="1" lang="ja-JP" altLang="en-US"/>
           </a:p>
@@ -978,7 +979,7 @@
           <a:p>
             <a:fld id="{E9CC885B-4903-4D54-9A93-00025F12DED9}" type="datetimeFigureOut">
               <a:rPr kumimoji="1" lang="ja-JP" altLang="en-US" smtClean="0"/>
-              <a:t>2025/7/24</a:t>
+              <a:t>2025/7/25</a:t>
             </a:fld>
             <a:endParaRPr kumimoji="1" lang="ja-JP" altLang="en-US"/>
           </a:p>
@@ -1253,7 +1254,7 @@
           <a:p>
             <a:fld id="{E9CC885B-4903-4D54-9A93-00025F12DED9}" type="datetimeFigureOut">
               <a:rPr kumimoji="1" lang="ja-JP" altLang="en-US" smtClean="0"/>
-              <a:t>2025/7/24</a:t>
+              <a:t>2025/7/25</a:t>
             </a:fld>
             <a:endParaRPr kumimoji="1" lang="ja-JP" altLang="en-US"/>
           </a:p>
@@ -1582,7 +1583,7 @@
           <a:p>
             <a:fld id="{E9CC885B-4903-4D54-9A93-00025F12DED9}" type="datetimeFigureOut">
               <a:rPr kumimoji="1" lang="ja-JP" altLang="en-US" smtClean="0"/>
-              <a:t>2025/7/24</a:t>
+              <a:t>2025/7/25</a:t>
             </a:fld>
             <a:endParaRPr kumimoji="1" lang="ja-JP" altLang="en-US"/>
           </a:p>
@@ -2058,7 +2059,7 @@
           <a:p>
             <a:fld id="{E9CC885B-4903-4D54-9A93-00025F12DED9}" type="datetimeFigureOut">
               <a:rPr kumimoji="1" lang="ja-JP" altLang="en-US" smtClean="0"/>
-              <a:t>2025/7/24</a:t>
+              <a:t>2025/7/25</a:t>
             </a:fld>
             <a:endParaRPr kumimoji="1" lang="ja-JP" altLang="en-US"/>
           </a:p>
@@ -2199,7 +2200,7 @@
           <a:p>
             <a:fld id="{E9CC885B-4903-4D54-9A93-00025F12DED9}" type="datetimeFigureOut">
               <a:rPr kumimoji="1" lang="ja-JP" altLang="en-US" smtClean="0"/>
-              <a:t>2025/7/24</a:t>
+              <a:t>2025/7/25</a:t>
             </a:fld>
             <a:endParaRPr kumimoji="1" lang="ja-JP" altLang="en-US"/>
           </a:p>
@@ -2312,7 +2313,7 @@
           <a:p>
             <a:fld id="{E9CC885B-4903-4D54-9A93-00025F12DED9}" type="datetimeFigureOut">
               <a:rPr kumimoji="1" lang="ja-JP" altLang="en-US" smtClean="0"/>
-              <a:t>2025/7/24</a:t>
+              <a:t>2025/7/25</a:t>
             </a:fld>
             <a:endParaRPr kumimoji="1" lang="ja-JP" altLang="en-US"/>
           </a:p>
@@ -2655,7 +2656,7 @@
           <a:p>
             <a:fld id="{E9CC885B-4903-4D54-9A93-00025F12DED9}" type="datetimeFigureOut">
               <a:rPr kumimoji="1" lang="ja-JP" altLang="en-US" smtClean="0"/>
-              <a:t>2025/7/24</a:t>
+              <a:t>2025/7/25</a:t>
             </a:fld>
             <a:endParaRPr kumimoji="1" lang="ja-JP" altLang="en-US"/>
           </a:p>
@@ -2943,7 +2944,7 @@
           <a:p>
             <a:fld id="{E9CC885B-4903-4D54-9A93-00025F12DED9}" type="datetimeFigureOut">
               <a:rPr kumimoji="1" lang="ja-JP" altLang="en-US" smtClean="0"/>
-              <a:t>2025/7/24</a:t>
+              <a:t>2025/7/25</a:t>
             </a:fld>
             <a:endParaRPr kumimoji="1" lang="ja-JP" altLang="en-US"/>
           </a:p>
@@ -3216,7 +3217,7 @@
           <a:p>
             <a:fld id="{E9CC885B-4903-4D54-9A93-00025F12DED9}" type="datetimeFigureOut">
               <a:rPr kumimoji="1" lang="ja-JP" altLang="en-US" smtClean="0"/>
-              <a:t>2025/7/24</a:t>
+              <a:t>2025/7/25</a:t>
             </a:fld>
             <a:endParaRPr kumimoji="1" lang="ja-JP" altLang="en-US"/>
           </a:p>
@@ -4577,7 +4578,7 @@
         <p:spPr>
           <a:xfrm>
             <a:off x="567542" y="1216429"/>
-            <a:ext cx="7879080" cy="461665"/>
+            <a:ext cx="8494633" cy="461665"/>
           </a:xfrm>
           <a:prstGeom prst="rect">
             <a:avLst/>
@@ -4592,7 +4593,7 @@
           <a:p>
             <a:r>
               <a:rPr lang="ja-JP" altLang="en-US" sz="2400" dirty="0"/>
-              <a:t>キューブを配置して作った元を追加していきましょう。</a:t>
+              <a:t>キューブを配置して作成したものを追加していきましょう。</a:t>
             </a:r>
             <a:endParaRPr lang="en-US" altLang="ja-JP" sz="2400" dirty="0"/>
           </a:p>
@@ -5159,7 +5160,7 @@
         <p:spPr>
           <a:xfrm>
             <a:off x="567542" y="1216429"/>
-            <a:ext cx="9725739" cy="1200329"/>
+            <a:ext cx="8186857" cy="830997"/>
           </a:xfrm>
           <a:prstGeom prst="rect">
             <a:avLst/>
@@ -5174,41 +5175,14 @@
           <a:p>
             <a:r>
               <a:rPr lang="ja-JP" altLang="en-US" sz="2400" dirty="0"/>
-              <a:t>ノイズの値が</a:t>
-            </a:r>
-            <a:r>
-              <a:rPr lang="en-US" altLang="ja-JP" sz="2400" b="1" dirty="0">
-                <a:solidFill>
-                  <a:srgbClr val="0070C0"/>
-                </a:solidFill>
-              </a:rPr>
-              <a:t>_</a:t>
-            </a:r>
-            <a:r>
-              <a:rPr lang="en-US" altLang="ja-JP" sz="2400" b="1" dirty="0" err="1">
-                <a:solidFill>
-                  <a:srgbClr val="0070C0"/>
-                </a:solidFill>
-              </a:rPr>
-              <a:t>DissolveAmount</a:t>
-            </a:r>
+              <a:t>アプリ側（シェーダーじゃない方）のプログラムから、</a:t>
+            </a:r>
+            <a:endParaRPr lang="en-US" altLang="ja-JP" sz="2400" dirty="0"/>
+          </a:p>
+          <a:p>
             <a:r>
               <a:rPr lang="ja-JP" altLang="en-US" sz="2400" dirty="0"/>
-              <a:t>よりも小さいと、</a:t>
-            </a:r>
-            <a:endParaRPr lang="en-US" altLang="ja-JP" sz="2400" dirty="0"/>
-          </a:p>
-          <a:p>
-            <a:r>
-              <a:rPr lang="ja-JP" altLang="en-US" sz="2400" dirty="0"/>
-              <a:t>そのピクセルは描画しないようにしています。</a:t>
-            </a:r>
-            <a:endParaRPr lang="en-US" altLang="ja-JP" sz="2400" dirty="0"/>
-          </a:p>
-          <a:p>
-            <a:r>
-              <a:rPr lang="ja-JP" altLang="en-US" sz="2400" dirty="0"/>
-              <a:t>つまり、ノイズに合わせて徐々に透明になっていくことになります。</a:t>
+              <a:t>シェーダープログラムの変数を設定できたりもします。</a:t>
             </a:r>
             <a:endParaRPr lang="en-US" altLang="ja-JP" sz="2400" dirty="0"/>
           </a:p>
@@ -5216,10 +5190,10 @@
       </p:sp>
       <p:pic>
         <p:nvPicPr>
-          <p:cNvPr id="5" name="図 4">
-            <a:extLst>
-              <a:ext uri="{FF2B5EF4-FFF2-40B4-BE49-F238E27FC236}">
-                <a16:creationId xmlns:a16="http://schemas.microsoft.com/office/drawing/2014/main" id="{2163E5E2-6AB2-4A11-9E79-E5AF7E0C5F59}"/>
+          <p:cNvPr id="3" name="図 2">
+            <a:extLst>
+              <a:ext uri="{FF2B5EF4-FFF2-40B4-BE49-F238E27FC236}">
+                <a16:creationId xmlns:a16="http://schemas.microsoft.com/office/drawing/2014/main" id="{A6E985BD-BBAC-4839-AF53-49DC2949DC0C}"/>
               </a:ext>
             </a:extLst>
           </p:cNvPr>
@@ -5236,134 +5210,18 @@
         </p:blipFill>
         <p:spPr>
           <a:xfrm>
-            <a:off x="567542" y="2556458"/>
-            <a:ext cx="7640116" cy="676369"/>
+            <a:off x="567542" y="2187126"/>
+            <a:ext cx="8816159" cy="2156274"/>
           </a:xfrm>
           <a:prstGeom prst="rect">
             <a:avLst/>
           </a:prstGeom>
         </p:spPr>
       </p:pic>
-      <p:sp>
-        <p:nvSpPr>
-          <p:cNvPr id="7" name="テキスト ボックス 6">
-            <a:extLst>
-              <a:ext uri="{FF2B5EF4-FFF2-40B4-BE49-F238E27FC236}">
-                <a16:creationId xmlns:a16="http://schemas.microsoft.com/office/drawing/2014/main" id="{C7397442-DEEF-42A7-A62C-1A3D6F585437}"/>
-              </a:ext>
-            </a:extLst>
-          </p:cNvPr>
-          <p:cNvSpPr txBox="1"/>
-          <p:nvPr/>
-        </p:nvSpPr>
-        <p:spPr>
-          <a:xfrm>
-            <a:off x="567541" y="3231972"/>
-            <a:ext cx="8650125" cy="2677656"/>
-          </a:xfrm>
-          <a:prstGeom prst="rect">
-            <a:avLst/>
-          </a:prstGeom>
-          <a:noFill/>
-        </p:spPr>
-        <p:txBody>
-          <a:bodyPr wrap="none" rtlCol="0">
-            <a:spAutoFit/>
-          </a:bodyPr>
-          <a:lstStyle/>
-          <a:p>
-            <a:r>
-              <a:rPr lang="en-US" altLang="ja-JP" sz="2400" b="1" dirty="0" err="1">
-                <a:solidFill>
-                  <a:srgbClr val="0070C0"/>
-                </a:solidFill>
-              </a:rPr>
-              <a:t>Smoothstep</a:t>
-            </a:r>
-            <a:r>
-              <a:rPr lang="ja-JP" altLang="en-US" sz="2400" b="1" dirty="0">
-                <a:solidFill>
-                  <a:srgbClr val="0070C0"/>
-                </a:solidFill>
-              </a:rPr>
-              <a:t>関数</a:t>
-            </a:r>
-            <a:r>
-              <a:rPr lang="ja-JP" altLang="en-US" sz="2400" dirty="0"/>
-              <a:t>を使うと、</a:t>
-            </a:r>
-            <a:endParaRPr lang="en-US" altLang="ja-JP" sz="2400" dirty="0"/>
-          </a:p>
-          <a:p>
-            <a:r>
-              <a:rPr lang="en-US" altLang="ja-JP" sz="2400" b="1" dirty="0">
-                <a:solidFill>
-                  <a:srgbClr val="FF0000"/>
-                </a:solidFill>
-              </a:rPr>
-              <a:t>Noise &lt; threshold = 0</a:t>
-            </a:r>
-          </a:p>
-          <a:p>
-            <a:r>
-              <a:rPr lang="en-US" altLang="ja-JP" sz="2400" b="1" dirty="0">
-                <a:solidFill>
-                  <a:srgbClr val="FF0000"/>
-                </a:solidFill>
-              </a:rPr>
-              <a:t>Noise &gt; threshold = 1</a:t>
-            </a:r>
-          </a:p>
-          <a:p>
-            <a:r>
-              <a:rPr lang="ja-JP" altLang="en-US" sz="2400" dirty="0"/>
-              <a:t>を実現できます。</a:t>
-            </a:r>
-            <a:endParaRPr lang="en-US" altLang="ja-JP" sz="2400" dirty="0"/>
-          </a:p>
-          <a:p>
-            <a:r>
-              <a:rPr lang="ja-JP" altLang="en-US" sz="2400" dirty="0"/>
-              <a:t>（</a:t>
-            </a:r>
-            <a:r>
-              <a:rPr lang="en-US" altLang="ja-JP" sz="2400" b="1" dirty="0">
-                <a:solidFill>
-                  <a:srgbClr val="0070C0"/>
-                </a:solidFill>
-              </a:rPr>
-              <a:t>_</a:t>
-            </a:r>
-            <a:r>
-              <a:rPr lang="en-US" altLang="ja-JP" sz="2400" b="1" dirty="0" err="1">
-                <a:solidFill>
-                  <a:srgbClr val="0070C0"/>
-                </a:solidFill>
-              </a:rPr>
-              <a:t>EdgeWidth</a:t>
-            </a:r>
-            <a:r>
-              <a:rPr lang="ja-JP" altLang="en-US" sz="2400" dirty="0"/>
-              <a:t>を引くことにより、エッジ部分は残している）</a:t>
-            </a:r>
-            <a:endParaRPr lang="en-US" altLang="ja-JP" sz="2400" dirty="0"/>
-          </a:p>
-          <a:p>
-            <a:endParaRPr lang="en-US" altLang="ja-JP" sz="2400" dirty="0"/>
-          </a:p>
-          <a:p>
-            <a:r>
-              <a:rPr lang="ja-JP" altLang="en-US" sz="2400" dirty="0"/>
-              <a:t>詳しい挙動は調べてみましょう。</a:t>
-            </a:r>
-            <a:endParaRPr lang="en-US" altLang="ja-JP" sz="2400" dirty="0"/>
-          </a:p>
-        </p:txBody>
-      </p:sp>
     </p:spTree>
     <p:extLst>
       <p:ext uri="{BB962C8B-B14F-4D97-AF65-F5344CB8AC3E}">
-        <p14:creationId xmlns:p14="http://schemas.microsoft.com/office/powerpoint/2010/main" val="1219306003"/>
+        <p14:creationId xmlns:p14="http://schemas.microsoft.com/office/powerpoint/2010/main" val="1055121748"/>
       </p:ext>
     </p:extLst>
   </p:cSld>
@@ -5441,7 +5299,7 @@
         <p:spPr>
           <a:xfrm>
             <a:off x="567542" y="1216429"/>
-            <a:ext cx="11264622" cy="1938992"/>
+            <a:ext cx="9725739" cy="1200329"/>
           </a:xfrm>
           <a:prstGeom prst="rect">
             <a:avLst/>
@@ -5456,31 +5314,41 @@
           <a:p>
             <a:r>
               <a:rPr lang="ja-JP" altLang="en-US" sz="2400" dirty="0"/>
-              <a:t>このようにノイズは様々な演出や装飾に使うことができます。</a:t>
+              <a:t>ノイズの値が</a:t>
+            </a:r>
+            <a:r>
+              <a:rPr lang="en-US" altLang="ja-JP" sz="2400" b="1" dirty="0">
+                <a:solidFill>
+                  <a:srgbClr val="0070C0"/>
+                </a:solidFill>
+              </a:rPr>
+              <a:t>_</a:t>
+            </a:r>
+            <a:r>
+              <a:rPr lang="en-US" altLang="ja-JP" sz="2400" b="1" dirty="0" err="1">
+                <a:solidFill>
+                  <a:srgbClr val="0070C0"/>
+                </a:solidFill>
+              </a:rPr>
+              <a:t>DissolveAmount</a:t>
+            </a:r>
+            <a:r>
+              <a:rPr lang="ja-JP" altLang="en-US" sz="2400" dirty="0"/>
+              <a:t>よりも小さいと、</a:t>
             </a:r>
             <a:endParaRPr lang="en-US" altLang="ja-JP" sz="2400" dirty="0"/>
           </a:p>
           <a:p>
             <a:r>
               <a:rPr lang="ja-JP" altLang="en-US" sz="2400" dirty="0"/>
-              <a:t>興味がある方は、ほかにどのような使われ方がされているか調べてみましょう。</a:t>
+              <a:t>そのピクセルは描画しないようにしています。</a:t>
             </a:r>
             <a:endParaRPr lang="en-US" altLang="ja-JP" sz="2400" dirty="0"/>
           </a:p>
           <a:p>
-            <a:endParaRPr lang="en-US" altLang="ja-JP" sz="2400" dirty="0"/>
-          </a:p>
-          <a:p>
             <a:r>
               <a:rPr lang="ja-JP" altLang="en-US" sz="2400" dirty="0"/>
-              <a:t>また、ノイズにも様々な種類があります。</a:t>
-            </a:r>
-            <a:endParaRPr lang="en-US" altLang="ja-JP" sz="2400" dirty="0"/>
-          </a:p>
-          <a:p>
-            <a:r>
-              <a:rPr lang="ja-JP" altLang="en-US" sz="2400" dirty="0"/>
-              <a:t>併せて調べてみましょう。</a:t>
+              <a:t>つまり、ノイズに合わせて徐々に透明になっていくことになります。</a:t>
             </a:r>
             <a:endParaRPr lang="en-US" altLang="ja-JP" sz="2400" dirty="0"/>
           </a:p>
@@ -5488,10 +5356,10 @@
       </p:sp>
       <p:pic>
         <p:nvPicPr>
-          <p:cNvPr id="8" name="図 7">
-            <a:extLst>
-              <a:ext uri="{FF2B5EF4-FFF2-40B4-BE49-F238E27FC236}">
-                <a16:creationId xmlns:a16="http://schemas.microsoft.com/office/drawing/2014/main" id="{787DE2FB-5D21-4C11-86CC-0524D875DA4F}"/>
+          <p:cNvPr id="5" name="図 4">
+            <a:extLst>
+              <a:ext uri="{FF2B5EF4-FFF2-40B4-BE49-F238E27FC236}">
+                <a16:creationId xmlns:a16="http://schemas.microsoft.com/office/drawing/2014/main" id="{2163E5E2-6AB2-4A11-9E79-E5AF7E0C5F59}"/>
               </a:ext>
             </a:extLst>
           </p:cNvPr>
@@ -5501,103 +5369,141 @@
           <p:nvPr/>
         </p:nvPicPr>
         <p:blipFill>
-          <a:blip r:embed="rId2">
-            <a:extLst>
-              <a:ext uri="{28A0092B-C50C-407E-A947-70E740481C1C}">
-                <a14:useLocalDpi xmlns:a14="http://schemas.microsoft.com/office/drawing/2010/main" val="0"/>
-              </a:ext>
-            </a:extLst>
-          </a:blip>
+          <a:blip r:embed="rId2"/>
           <a:stretch>
             <a:fillRect/>
           </a:stretch>
         </p:blipFill>
         <p:spPr>
           <a:xfrm>
-            <a:off x="567543" y="3429001"/>
-            <a:ext cx="2616200" cy="2616200"/>
+            <a:off x="567542" y="2556458"/>
+            <a:ext cx="7640116" cy="676369"/>
           </a:xfrm>
           <a:prstGeom prst="rect">
             <a:avLst/>
           </a:prstGeom>
         </p:spPr>
       </p:pic>
-      <p:pic>
-        <p:nvPicPr>
-          <p:cNvPr id="9" name="図 8">
-            <a:extLst>
-              <a:ext uri="{FF2B5EF4-FFF2-40B4-BE49-F238E27FC236}">
-                <a16:creationId xmlns:a16="http://schemas.microsoft.com/office/drawing/2014/main" id="{6D80FEF2-A829-4608-B4EB-9F76E96B4F14}"/>
-              </a:ext>
-            </a:extLst>
-          </p:cNvPr>
-          <p:cNvPicPr>
-            <a:picLocks noChangeAspect="1"/>
-          </p:cNvPicPr>
+      <p:sp>
+        <p:nvSpPr>
+          <p:cNvPr id="7" name="テキスト ボックス 6">
+            <a:extLst>
+              <a:ext uri="{FF2B5EF4-FFF2-40B4-BE49-F238E27FC236}">
+                <a16:creationId xmlns:a16="http://schemas.microsoft.com/office/drawing/2014/main" id="{C7397442-DEEF-42A7-A62C-1A3D6F585437}"/>
+              </a:ext>
+            </a:extLst>
+          </p:cNvPr>
+          <p:cNvSpPr txBox="1"/>
           <p:nvPr/>
-        </p:nvPicPr>
-        <p:blipFill>
-          <a:blip r:embed="rId3">
-            <a:extLst>
-              <a:ext uri="{28A0092B-C50C-407E-A947-70E740481C1C}">
-                <a14:useLocalDpi xmlns:a14="http://schemas.microsoft.com/office/drawing/2010/main" val="0"/>
-              </a:ext>
-            </a:extLst>
-          </a:blip>
-          <a:stretch>
-            <a:fillRect/>
-          </a:stretch>
-        </p:blipFill>
-        <p:spPr>
-          <a:xfrm>
-            <a:off x="3961384" y="3428999"/>
-            <a:ext cx="2616201" cy="2616201"/>
+        </p:nvSpPr>
+        <p:spPr>
+          <a:xfrm>
+            <a:off x="567541" y="3231972"/>
+            <a:ext cx="8650125" cy="2677656"/>
           </a:xfrm>
           <a:prstGeom prst="rect">
             <a:avLst/>
           </a:prstGeom>
-        </p:spPr>
-      </p:pic>
-      <p:pic>
-        <p:nvPicPr>
-          <p:cNvPr id="3" name="図 2">
-            <a:extLst>
-              <a:ext uri="{FF2B5EF4-FFF2-40B4-BE49-F238E27FC236}">
-                <a16:creationId xmlns:a16="http://schemas.microsoft.com/office/drawing/2014/main" id="{3C1753C0-E46A-48B8-A8BE-CAD0654A92F8}"/>
-              </a:ext>
-            </a:extLst>
-          </p:cNvPr>
-          <p:cNvPicPr>
-            <a:picLocks noChangeAspect="1"/>
-          </p:cNvPicPr>
-          <p:nvPr/>
-        </p:nvPicPr>
-        <p:blipFill>
-          <a:blip r:embed="rId4">
-            <a:extLst>
-              <a:ext uri="{28A0092B-C50C-407E-A947-70E740481C1C}">
-                <a14:useLocalDpi xmlns:a14="http://schemas.microsoft.com/office/drawing/2010/main" val="0"/>
-              </a:ext>
-            </a:extLst>
-          </a:blip>
-          <a:stretch>
-            <a:fillRect/>
-          </a:stretch>
-        </p:blipFill>
-        <p:spPr>
-          <a:xfrm>
-            <a:off x="7107827" y="3428999"/>
-            <a:ext cx="2616200" cy="2616200"/>
-          </a:xfrm>
-          <a:prstGeom prst="rect">
-            <a:avLst/>
-          </a:prstGeom>
-        </p:spPr>
-      </p:pic>
+          <a:noFill/>
+        </p:spPr>
+        <p:txBody>
+          <a:bodyPr wrap="none" rtlCol="0">
+            <a:spAutoFit/>
+          </a:bodyPr>
+          <a:lstStyle/>
+          <a:p>
+            <a:r>
+              <a:rPr lang="en-US" altLang="ja-JP" sz="2400" b="1" dirty="0" err="1">
+                <a:solidFill>
+                  <a:srgbClr val="0070C0"/>
+                </a:solidFill>
+              </a:rPr>
+              <a:t>Smoothstep</a:t>
+            </a:r>
+            <a:r>
+              <a:rPr lang="ja-JP" altLang="en-US" sz="2400" b="1" dirty="0">
+                <a:solidFill>
+                  <a:srgbClr val="0070C0"/>
+                </a:solidFill>
+              </a:rPr>
+              <a:t>関数</a:t>
+            </a:r>
+            <a:r>
+              <a:rPr lang="ja-JP" altLang="en-US" sz="2400" dirty="0"/>
+              <a:t>を使うと、</a:t>
+            </a:r>
+            <a:endParaRPr lang="en-US" altLang="ja-JP" sz="2400" dirty="0"/>
+          </a:p>
+          <a:p>
+            <a:r>
+              <a:rPr lang="en-US" altLang="ja-JP" sz="2400" b="1" dirty="0">
+                <a:solidFill>
+                  <a:srgbClr val="FF0000"/>
+                </a:solidFill>
+              </a:rPr>
+              <a:t>Noise &lt; threshold = 0</a:t>
+            </a:r>
+          </a:p>
+          <a:p>
+            <a:r>
+              <a:rPr lang="en-US" altLang="ja-JP" sz="2400" b="1" dirty="0">
+                <a:solidFill>
+                  <a:srgbClr val="FF0000"/>
+                </a:solidFill>
+              </a:rPr>
+              <a:t>Noise &gt; threshold = 1</a:t>
+            </a:r>
+          </a:p>
+          <a:p>
+            <a:r>
+              <a:rPr lang="ja-JP" altLang="en-US" sz="2400" dirty="0"/>
+              <a:t>を実現できます。</a:t>
+            </a:r>
+            <a:endParaRPr lang="en-US" altLang="ja-JP" sz="2400" dirty="0"/>
+          </a:p>
+          <a:p>
+            <a:r>
+              <a:rPr lang="ja-JP" altLang="en-US" sz="2400" dirty="0"/>
+              <a:t>（</a:t>
+            </a:r>
+            <a:r>
+              <a:rPr lang="en-US" altLang="ja-JP" sz="2400" b="1" dirty="0">
+                <a:solidFill>
+                  <a:srgbClr val="0070C0"/>
+                </a:solidFill>
+              </a:rPr>
+              <a:t>_</a:t>
+            </a:r>
+            <a:r>
+              <a:rPr lang="en-US" altLang="ja-JP" sz="2400" b="1" dirty="0" err="1">
+                <a:solidFill>
+                  <a:srgbClr val="0070C0"/>
+                </a:solidFill>
+              </a:rPr>
+              <a:t>EdgeWidth</a:t>
+            </a:r>
+            <a:r>
+              <a:rPr lang="ja-JP" altLang="en-US" sz="2400" dirty="0"/>
+              <a:t>を引くことにより、エッジ部分は残している）</a:t>
+            </a:r>
+            <a:endParaRPr lang="en-US" altLang="ja-JP" sz="2400" dirty="0"/>
+          </a:p>
+          <a:p>
+            <a:endParaRPr lang="en-US" altLang="ja-JP" sz="2400" dirty="0"/>
+          </a:p>
+          <a:p>
+            <a:r>
+              <a:rPr lang="ja-JP" altLang="en-US" sz="2400" dirty="0"/>
+              <a:t>詳しい挙動は調べてみましょう。</a:t>
+            </a:r>
+            <a:endParaRPr lang="en-US" altLang="ja-JP" sz="2400" dirty="0"/>
+          </a:p>
+        </p:txBody>
+      </p:sp>
     </p:spTree>
     <p:extLst>
       <p:ext uri="{BB962C8B-B14F-4D97-AF65-F5344CB8AC3E}">
-        <p14:creationId xmlns:p14="http://schemas.microsoft.com/office/powerpoint/2010/main" val="357584926"/>
+        <p14:creationId xmlns:p14="http://schemas.microsoft.com/office/powerpoint/2010/main" val="1219306003"/>
       </p:ext>
     </p:extLst>
   </p:cSld>
@@ -5860,6 +5766,240 @@
         <p:spPr>
           <a:xfrm>
             <a:off x="567542" y="491954"/>
+            <a:ext cx="1415772" cy="584775"/>
+          </a:xfrm>
+          <a:prstGeom prst="rect">
+            <a:avLst/>
+          </a:prstGeom>
+          <a:noFill/>
+        </p:spPr>
+        <p:txBody>
+          <a:bodyPr wrap="none" rtlCol="0">
+            <a:spAutoFit/>
+          </a:bodyPr>
+          <a:lstStyle/>
+          <a:p>
+            <a:r>
+              <a:rPr lang="ja-JP" altLang="en-US" sz="3200" b="1" u="sng" dirty="0"/>
+              <a:t>ノイズ</a:t>
+            </a:r>
+            <a:endParaRPr kumimoji="1" lang="en-US" altLang="ja-JP" sz="3200" b="1" u="sng" dirty="0"/>
+          </a:p>
+        </p:txBody>
+      </p:sp>
+      <p:sp>
+        <p:nvSpPr>
+          <p:cNvPr id="6" name="テキスト ボックス 5">
+            <a:extLst>
+              <a:ext uri="{FF2B5EF4-FFF2-40B4-BE49-F238E27FC236}">
+                <a16:creationId xmlns:a16="http://schemas.microsoft.com/office/drawing/2014/main" id="{55830AD6-028B-4C4E-80BF-B70DFC1C3A46}"/>
+              </a:ext>
+            </a:extLst>
+          </p:cNvPr>
+          <p:cNvSpPr txBox="1"/>
+          <p:nvPr/>
+        </p:nvSpPr>
+        <p:spPr>
+          <a:xfrm>
+            <a:off x="567542" y="1216429"/>
+            <a:ext cx="11264622" cy="1938992"/>
+          </a:xfrm>
+          <a:prstGeom prst="rect">
+            <a:avLst/>
+          </a:prstGeom>
+          <a:noFill/>
+        </p:spPr>
+        <p:txBody>
+          <a:bodyPr wrap="none" rtlCol="0">
+            <a:spAutoFit/>
+          </a:bodyPr>
+          <a:lstStyle/>
+          <a:p>
+            <a:r>
+              <a:rPr lang="ja-JP" altLang="en-US" sz="2400" dirty="0"/>
+              <a:t>このようにノイズは様々な演出や装飾に使うことができます。</a:t>
+            </a:r>
+            <a:endParaRPr lang="en-US" altLang="ja-JP" sz="2400" dirty="0"/>
+          </a:p>
+          <a:p>
+            <a:r>
+              <a:rPr lang="ja-JP" altLang="en-US" sz="2400" dirty="0"/>
+              <a:t>興味がある方は、ほかにどのような使われ方がされているか調べてみましょう。</a:t>
+            </a:r>
+            <a:endParaRPr lang="en-US" altLang="ja-JP" sz="2400" dirty="0"/>
+          </a:p>
+          <a:p>
+            <a:endParaRPr lang="en-US" altLang="ja-JP" sz="2400" dirty="0"/>
+          </a:p>
+          <a:p>
+            <a:r>
+              <a:rPr lang="ja-JP" altLang="en-US" sz="2400" dirty="0"/>
+              <a:t>また、ノイズにも様々な種類があります。</a:t>
+            </a:r>
+            <a:endParaRPr lang="en-US" altLang="ja-JP" sz="2400" dirty="0"/>
+          </a:p>
+          <a:p>
+            <a:r>
+              <a:rPr lang="ja-JP" altLang="en-US" sz="2400" dirty="0"/>
+              <a:t>併せて調べてみましょう。</a:t>
+            </a:r>
+            <a:endParaRPr lang="en-US" altLang="ja-JP" sz="2400" dirty="0"/>
+          </a:p>
+        </p:txBody>
+      </p:sp>
+      <p:pic>
+        <p:nvPicPr>
+          <p:cNvPr id="8" name="図 7">
+            <a:extLst>
+              <a:ext uri="{FF2B5EF4-FFF2-40B4-BE49-F238E27FC236}">
+                <a16:creationId xmlns:a16="http://schemas.microsoft.com/office/drawing/2014/main" id="{787DE2FB-5D21-4C11-86CC-0524D875DA4F}"/>
+              </a:ext>
+            </a:extLst>
+          </p:cNvPr>
+          <p:cNvPicPr>
+            <a:picLocks noChangeAspect="1"/>
+          </p:cNvPicPr>
+          <p:nvPr/>
+        </p:nvPicPr>
+        <p:blipFill>
+          <a:blip r:embed="rId2">
+            <a:extLst>
+              <a:ext uri="{28A0092B-C50C-407E-A947-70E740481C1C}">
+                <a14:useLocalDpi xmlns:a14="http://schemas.microsoft.com/office/drawing/2010/main" val="0"/>
+              </a:ext>
+            </a:extLst>
+          </a:blip>
+          <a:stretch>
+            <a:fillRect/>
+          </a:stretch>
+        </p:blipFill>
+        <p:spPr>
+          <a:xfrm>
+            <a:off x="567543" y="3429001"/>
+            <a:ext cx="2616200" cy="2616200"/>
+          </a:xfrm>
+          <a:prstGeom prst="rect">
+            <a:avLst/>
+          </a:prstGeom>
+        </p:spPr>
+      </p:pic>
+      <p:pic>
+        <p:nvPicPr>
+          <p:cNvPr id="9" name="図 8">
+            <a:extLst>
+              <a:ext uri="{FF2B5EF4-FFF2-40B4-BE49-F238E27FC236}">
+                <a16:creationId xmlns:a16="http://schemas.microsoft.com/office/drawing/2014/main" id="{6D80FEF2-A829-4608-B4EB-9F76E96B4F14}"/>
+              </a:ext>
+            </a:extLst>
+          </p:cNvPr>
+          <p:cNvPicPr>
+            <a:picLocks noChangeAspect="1"/>
+          </p:cNvPicPr>
+          <p:nvPr/>
+        </p:nvPicPr>
+        <p:blipFill>
+          <a:blip r:embed="rId3">
+            <a:extLst>
+              <a:ext uri="{28A0092B-C50C-407E-A947-70E740481C1C}">
+                <a14:useLocalDpi xmlns:a14="http://schemas.microsoft.com/office/drawing/2010/main" val="0"/>
+              </a:ext>
+            </a:extLst>
+          </a:blip>
+          <a:stretch>
+            <a:fillRect/>
+          </a:stretch>
+        </p:blipFill>
+        <p:spPr>
+          <a:xfrm>
+            <a:off x="3837684" y="3428999"/>
+            <a:ext cx="2616201" cy="2616201"/>
+          </a:xfrm>
+          <a:prstGeom prst="rect">
+            <a:avLst/>
+          </a:prstGeom>
+        </p:spPr>
+      </p:pic>
+      <p:pic>
+        <p:nvPicPr>
+          <p:cNvPr id="3" name="図 2">
+            <a:extLst>
+              <a:ext uri="{FF2B5EF4-FFF2-40B4-BE49-F238E27FC236}">
+                <a16:creationId xmlns:a16="http://schemas.microsoft.com/office/drawing/2014/main" id="{3C1753C0-E46A-48B8-A8BE-CAD0654A92F8}"/>
+              </a:ext>
+            </a:extLst>
+          </p:cNvPr>
+          <p:cNvPicPr>
+            <a:picLocks noChangeAspect="1"/>
+          </p:cNvPicPr>
+          <p:nvPr/>
+        </p:nvPicPr>
+        <p:blipFill>
+          <a:blip r:embed="rId4">
+            <a:extLst>
+              <a:ext uri="{28A0092B-C50C-407E-A947-70E740481C1C}">
+                <a14:useLocalDpi xmlns:a14="http://schemas.microsoft.com/office/drawing/2010/main" val="0"/>
+              </a:ext>
+            </a:extLst>
+          </a:blip>
+          <a:stretch>
+            <a:fillRect/>
+          </a:stretch>
+        </p:blipFill>
+        <p:spPr>
+          <a:xfrm>
+            <a:off x="7107827" y="3428999"/>
+            <a:ext cx="2616200" cy="2616200"/>
+          </a:xfrm>
+          <a:prstGeom prst="rect">
+            <a:avLst/>
+          </a:prstGeom>
+        </p:spPr>
+      </p:pic>
+    </p:spTree>
+    <p:extLst>
+      <p:ext uri="{BB962C8B-B14F-4D97-AF65-F5344CB8AC3E}">
+        <p14:creationId xmlns:p14="http://schemas.microsoft.com/office/powerpoint/2010/main" val="357584926"/>
+      </p:ext>
+    </p:extLst>
+  </p:cSld>
+  <p:clrMapOvr>
+    <a:masterClrMapping/>
+  </p:clrMapOvr>
+</p:sld>
+</file>
+
+<file path=ppt/slides/slide21.xml><?xml version="1.0" encoding="utf-8"?>
+<p:sld xmlns:a="http://schemas.openxmlformats.org/drawingml/2006/main" xmlns:r="http://schemas.openxmlformats.org/officeDocument/2006/relationships" xmlns:p="http://schemas.openxmlformats.org/presentationml/2006/main">
+  <p:cSld>
+    <p:spTree>
+      <p:nvGrpSpPr>
+        <p:cNvPr id="1" name=""/>
+        <p:cNvGrpSpPr/>
+        <p:nvPr/>
+      </p:nvGrpSpPr>
+      <p:grpSpPr>
+        <a:xfrm>
+          <a:off x="0" y="0"/>
+          <a:ext cx="0" cy="0"/>
+          <a:chOff x="0" y="0"/>
+          <a:chExt cx="0" cy="0"/>
+        </a:xfrm>
+      </p:grpSpPr>
+      <p:sp>
+        <p:nvSpPr>
+          <p:cNvPr id="4" name="テキスト ボックス 3">
+            <a:extLst>
+              <a:ext uri="{FF2B5EF4-FFF2-40B4-BE49-F238E27FC236}">
+                <a16:creationId xmlns:a16="http://schemas.microsoft.com/office/drawing/2014/main" id="{5A13BF46-B8C5-48AA-8308-C9ECFF431A18}"/>
+              </a:ext>
+            </a:extLst>
+          </p:cNvPr>
+          <p:cNvSpPr txBox="1"/>
+          <p:nvPr/>
+        </p:nvSpPr>
+        <p:spPr>
+          <a:xfrm>
+            <a:off x="567542" y="491954"/>
             <a:ext cx="2353529" cy="584775"/>
           </a:xfrm>
           <a:prstGeom prst="rect">
@@ -6784,7 +6924,7 @@
         <p:spPr>
           <a:xfrm>
             <a:off x="567542" y="2424855"/>
-            <a:ext cx="11695830" cy="2677656"/>
+            <a:ext cx="11543545" cy="2677656"/>
           </a:xfrm>
           <a:prstGeom prst="rect">
             <a:avLst/>
@@ -6821,7 +6961,19 @@
           <a:p>
             <a:r>
               <a:rPr kumimoji="1" lang="ja-JP" altLang="en-US" sz="2400" dirty="0"/>
-              <a:t>このように２つの値の中間を計算する関数になります。</a:t>
+              <a:t>このように</a:t>
+            </a:r>
+            <a:r>
+              <a:rPr kumimoji="1" lang="ja-JP" altLang="en-US" sz="2400" b="1" dirty="0">
+                <a:solidFill>
+                  <a:srgbClr val="FF0000"/>
+                </a:solidFill>
+              </a:rPr>
+              <a:t>２つの値の中間を計算する関数</a:t>
+            </a:r>
+            <a:r>
+              <a:rPr kumimoji="1" lang="ja-JP" altLang="en-US" sz="2400" dirty="0"/>
+              <a:t>になります。</a:t>
             </a:r>
             <a:endParaRPr kumimoji="1" lang="en-US" altLang="ja-JP" sz="2400" dirty="0"/>
           </a:p>
@@ -6831,20 +6983,40 @@
               <a:t>つまり、</a:t>
             </a:r>
             <a:r>
-              <a:rPr lang="en-US" altLang="ja-JP" sz="2400" dirty="0" err="1"/>
+              <a:rPr lang="en-US" altLang="ja-JP" sz="2400" b="1" dirty="0" err="1">
+                <a:solidFill>
+                  <a:srgbClr val="FF0000"/>
+                </a:solidFill>
+              </a:rPr>
               <a:t>TextureA</a:t>
             </a:r>
             <a:r>
+              <a:rPr lang="ja-JP" altLang="en-US" sz="2400" b="1" dirty="0">
+                <a:solidFill>
+                  <a:srgbClr val="FF0000"/>
+                </a:solidFill>
+              </a:rPr>
+              <a:t>と</a:t>
+            </a:r>
+            <a:r>
+              <a:rPr lang="en-US" altLang="ja-JP" sz="2400" b="1" dirty="0" err="1">
+                <a:solidFill>
+                  <a:srgbClr val="FF0000"/>
+                </a:solidFill>
+              </a:rPr>
+              <a:t>TextureB</a:t>
+            </a:r>
+            <a:r>
+              <a:rPr lang="ja-JP" altLang="en-US" sz="2400" b="1" dirty="0">
+                <a:solidFill>
+                  <a:srgbClr val="FF0000"/>
+                </a:solidFill>
+              </a:rPr>
+              <a:t>の色の中間の色</a:t>
+            </a:r>
+            <a:r>
               <a:rPr lang="ja-JP" altLang="en-US" sz="2400" dirty="0"/>
-              <a:t>と</a:t>
-            </a:r>
-            <a:r>
-              <a:rPr lang="en-US" altLang="ja-JP" sz="2400" dirty="0" err="1"/>
-              <a:t>TextureB</a:t>
-            </a:r>
-            <a:r>
-              <a:rPr lang="ja-JP" altLang="en-US" sz="2400" dirty="0"/>
-              <a:t>の色の中間した色を返却します。（結果合成となる）</a:t>
+              <a:t>を返却します。（結果合成となる）</a:t>
             </a:r>
             <a:endParaRPr kumimoji="1" lang="en-US" altLang="ja-JP" sz="2400" dirty="0"/>
           </a:p>

--- a/ゲーム科2年/01_後期/ゲームプログラミング応用Ⅰ/06_ノイズ.pptx
+++ b/ゲーム科2年/01_後期/ゲームプログラミング応用Ⅰ/06_ノイズ.pptx
@@ -279,7 +279,7 @@
           <a:p>
             <a:fld id="{E9CC885B-4903-4D54-9A93-00025F12DED9}" type="datetimeFigureOut">
               <a:rPr kumimoji="1" lang="ja-JP" altLang="en-US" smtClean="0"/>
-              <a:t>2025/7/25</a:t>
+              <a:t>2025/7/31</a:t>
             </a:fld>
             <a:endParaRPr kumimoji="1" lang="ja-JP" altLang="en-US"/>
           </a:p>
@@ -509,7 +509,7 @@
           <a:p>
             <a:fld id="{E9CC885B-4903-4D54-9A93-00025F12DED9}" type="datetimeFigureOut">
               <a:rPr kumimoji="1" lang="ja-JP" altLang="en-US" smtClean="0"/>
-              <a:t>2025/7/25</a:t>
+              <a:t>2025/7/31</a:t>
             </a:fld>
             <a:endParaRPr kumimoji="1" lang="ja-JP" altLang="en-US"/>
           </a:p>
@@ -749,7 +749,7 @@
           <a:p>
             <a:fld id="{E9CC885B-4903-4D54-9A93-00025F12DED9}" type="datetimeFigureOut">
               <a:rPr kumimoji="1" lang="ja-JP" altLang="en-US" smtClean="0"/>
-              <a:t>2025/7/25</a:t>
+              <a:t>2025/7/31</a:t>
             </a:fld>
             <a:endParaRPr kumimoji="1" lang="ja-JP" altLang="en-US"/>
           </a:p>
@@ -979,7 +979,7 @@
           <a:p>
             <a:fld id="{E9CC885B-4903-4D54-9A93-00025F12DED9}" type="datetimeFigureOut">
               <a:rPr kumimoji="1" lang="ja-JP" altLang="en-US" smtClean="0"/>
-              <a:t>2025/7/25</a:t>
+              <a:t>2025/7/31</a:t>
             </a:fld>
             <a:endParaRPr kumimoji="1" lang="ja-JP" altLang="en-US"/>
           </a:p>
@@ -1254,7 +1254,7 @@
           <a:p>
             <a:fld id="{E9CC885B-4903-4D54-9A93-00025F12DED9}" type="datetimeFigureOut">
               <a:rPr kumimoji="1" lang="ja-JP" altLang="en-US" smtClean="0"/>
-              <a:t>2025/7/25</a:t>
+              <a:t>2025/7/31</a:t>
             </a:fld>
             <a:endParaRPr kumimoji="1" lang="ja-JP" altLang="en-US"/>
           </a:p>
@@ -1583,7 +1583,7 @@
           <a:p>
             <a:fld id="{E9CC885B-4903-4D54-9A93-00025F12DED9}" type="datetimeFigureOut">
               <a:rPr kumimoji="1" lang="ja-JP" altLang="en-US" smtClean="0"/>
-              <a:t>2025/7/25</a:t>
+              <a:t>2025/7/31</a:t>
             </a:fld>
             <a:endParaRPr kumimoji="1" lang="ja-JP" altLang="en-US"/>
           </a:p>
@@ -2059,7 +2059,7 @@
           <a:p>
             <a:fld id="{E9CC885B-4903-4D54-9A93-00025F12DED9}" type="datetimeFigureOut">
               <a:rPr kumimoji="1" lang="ja-JP" altLang="en-US" smtClean="0"/>
-              <a:t>2025/7/25</a:t>
+              <a:t>2025/7/31</a:t>
             </a:fld>
             <a:endParaRPr kumimoji="1" lang="ja-JP" altLang="en-US"/>
           </a:p>
@@ -2200,7 +2200,7 @@
           <a:p>
             <a:fld id="{E9CC885B-4903-4D54-9A93-00025F12DED9}" type="datetimeFigureOut">
               <a:rPr kumimoji="1" lang="ja-JP" altLang="en-US" smtClean="0"/>
-              <a:t>2025/7/25</a:t>
+              <a:t>2025/7/31</a:t>
             </a:fld>
             <a:endParaRPr kumimoji="1" lang="ja-JP" altLang="en-US"/>
           </a:p>
@@ -2313,7 +2313,7 @@
           <a:p>
             <a:fld id="{E9CC885B-4903-4D54-9A93-00025F12DED9}" type="datetimeFigureOut">
               <a:rPr kumimoji="1" lang="ja-JP" altLang="en-US" smtClean="0"/>
-              <a:t>2025/7/25</a:t>
+              <a:t>2025/7/31</a:t>
             </a:fld>
             <a:endParaRPr kumimoji="1" lang="ja-JP" altLang="en-US"/>
           </a:p>
@@ -2656,7 +2656,7 @@
           <a:p>
             <a:fld id="{E9CC885B-4903-4D54-9A93-00025F12DED9}" type="datetimeFigureOut">
               <a:rPr kumimoji="1" lang="ja-JP" altLang="en-US" smtClean="0"/>
-              <a:t>2025/7/25</a:t>
+              <a:t>2025/7/31</a:t>
             </a:fld>
             <a:endParaRPr kumimoji="1" lang="ja-JP" altLang="en-US"/>
           </a:p>
@@ -2944,7 +2944,7 @@
           <a:p>
             <a:fld id="{E9CC885B-4903-4D54-9A93-00025F12DED9}" type="datetimeFigureOut">
               <a:rPr kumimoji="1" lang="ja-JP" altLang="en-US" smtClean="0"/>
-              <a:t>2025/7/25</a:t>
+              <a:t>2025/7/31</a:t>
             </a:fld>
             <a:endParaRPr kumimoji="1" lang="ja-JP" altLang="en-US"/>
           </a:p>
@@ -3217,7 +3217,7 @@
           <a:p>
             <a:fld id="{E9CC885B-4903-4D54-9A93-00025F12DED9}" type="datetimeFigureOut">
               <a:rPr kumimoji="1" lang="ja-JP" altLang="en-US" smtClean="0"/>
-              <a:t>2025/7/25</a:t>
+              <a:t>2025/7/31</a:t>
             </a:fld>
             <a:endParaRPr kumimoji="1" lang="ja-JP" altLang="en-US"/>
           </a:p>
@@ -4882,7 +4882,7 @@
         <p:spPr>
           <a:xfrm>
             <a:off x="567542" y="1216429"/>
-            <a:ext cx="9052478" cy="1200329"/>
+            <a:ext cx="9243236" cy="1200329"/>
           </a:xfrm>
           <a:prstGeom prst="rect">
             <a:avLst/>
@@ -4917,7 +4917,7 @@
                   <a:srgbClr val="FF0000"/>
                 </a:solidFill>
               </a:rPr>
-              <a:t>DissolveAmout</a:t>
+              <a:t>DissolveAmount</a:t>
             </a:r>
             <a:r>
               <a:rPr lang="ja-JP" altLang="en-US" sz="2400" b="1" dirty="0">
@@ -5054,7 +5054,7 @@
         <p:spPr>
           <a:xfrm>
             <a:off x="567542" y="5238157"/>
-            <a:ext cx="5416868" cy="461665"/>
+            <a:ext cx="5109091" cy="461665"/>
           </a:xfrm>
           <a:prstGeom prst="rect">
             <a:avLst/>
@@ -5073,7 +5073,7 @@
                   <a:srgbClr val="FF0000"/>
                 </a:solidFill>
               </a:rPr>
-              <a:t>ノイズの白い部分にほど、残りやすい</a:t>
+              <a:t>ノイズの白が濃いほど、残りやすい</a:t>
             </a:r>
             <a:endParaRPr lang="en-US" altLang="ja-JP" sz="2400" dirty="0"/>
           </a:p>
